--- a/slides/presentation_v2.pptx
+++ b/slides/presentation_v2.pptx
@@ -4895,8 +4895,8 @@
         </p:nvSpPr>
         <p:spPr>
           <a:xfrm>
-            <a:off x="0" y="6263640"/>
-            <a:ext cx="411480" cy="457200"/>
+            <a:off x="0" y="6309360"/>
+            <a:ext cx="411480" cy="411480"/>
           </a:xfrm>
           <a:prstGeom prst="rect">
             <a:avLst/>
@@ -4904,13 +4904,13 @@
           <a:noFill/>
         </p:spPr>
         <p:txBody>
-          <a:bodyPr wrap="none">
+          <a:bodyPr wrap="none" lIns="0" rIns="0">
             <a:spAutoFit/>
           </a:bodyPr>
           <a:lstStyle/>
           <a:p>
             <a:pPr algn="ctr">
-              <a:defRPr sz="1200" b="1">
+              <a:defRPr sz="1100" b="1">
                 <a:solidFill>
                   <a:srgbClr val="BF9A4A"/>
                 </a:solidFill>
@@ -5217,8 +5217,8 @@
         </p:nvSpPr>
         <p:spPr>
           <a:xfrm>
-            <a:off x="0" y="6263640"/>
-            <a:ext cx="411480" cy="457200"/>
+            <a:off x="0" y="6309360"/>
+            <a:ext cx="411480" cy="411480"/>
           </a:xfrm>
           <a:prstGeom prst="rect">
             <a:avLst/>
@@ -5226,13 +5226,13 @@
           <a:noFill/>
         </p:spPr>
         <p:txBody>
-          <a:bodyPr wrap="none">
+          <a:bodyPr wrap="none" lIns="0" rIns="0">
             <a:spAutoFit/>
           </a:bodyPr>
           <a:lstStyle/>
           <a:p>
             <a:pPr algn="ctr">
-              <a:defRPr sz="1200" b="1">
+              <a:defRPr sz="1100" b="1">
                 <a:solidFill>
                   <a:srgbClr val="BF9A4A"/>
                 </a:solidFill>
@@ -5516,8 +5516,8 @@
         </p:nvSpPr>
         <p:spPr>
           <a:xfrm>
-            <a:off x="0" y="6263640"/>
-            <a:ext cx="411480" cy="457200"/>
+            <a:off x="0" y="6309360"/>
+            <a:ext cx="411480" cy="411480"/>
           </a:xfrm>
           <a:prstGeom prst="rect">
             <a:avLst/>
@@ -5525,13 +5525,13 @@
           <a:noFill/>
         </p:spPr>
         <p:txBody>
-          <a:bodyPr wrap="none">
+          <a:bodyPr wrap="none" lIns="0" rIns="0">
             <a:spAutoFit/>
           </a:bodyPr>
           <a:lstStyle/>
           <a:p>
             <a:pPr algn="ctr">
-              <a:defRPr sz="1200" b="1">
+              <a:defRPr sz="1100" b="1">
                 <a:solidFill>
                   <a:srgbClr val="BF9A4A"/>
                 </a:solidFill>
@@ -5838,8 +5838,8 @@
         </p:nvSpPr>
         <p:spPr>
           <a:xfrm>
-            <a:off x="0" y="6263640"/>
-            <a:ext cx="411480" cy="457200"/>
+            <a:off x="0" y="6309360"/>
+            <a:ext cx="411480" cy="411480"/>
           </a:xfrm>
           <a:prstGeom prst="rect">
             <a:avLst/>
@@ -5847,13 +5847,13 @@
           <a:noFill/>
         </p:spPr>
         <p:txBody>
-          <a:bodyPr wrap="none">
+          <a:bodyPr wrap="none" lIns="0" rIns="0">
             <a:spAutoFit/>
           </a:bodyPr>
           <a:lstStyle/>
           <a:p>
             <a:pPr algn="ctr">
-              <a:defRPr sz="1200" b="1">
+              <a:defRPr sz="1100" b="1">
                 <a:solidFill>
                   <a:srgbClr val="BF9A4A"/>
                 </a:solidFill>
@@ -6137,8 +6137,8 @@
         </p:nvSpPr>
         <p:spPr>
           <a:xfrm>
-            <a:off x="0" y="6263640"/>
-            <a:ext cx="411480" cy="457200"/>
+            <a:off x="0" y="6309360"/>
+            <a:ext cx="411480" cy="411480"/>
           </a:xfrm>
           <a:prstGeom prst="rect">
             <a:avLst/>
@@ -6146,13 +6146,13 @@
           <a:noFill/>
         </p:spPr>
         <p:txBody>
-          <a:bodyPr wrap="none">
+          <a:bodyPr wrap="none" lIns="0" rIns="0">
             <a:spAutoFit/>
           </a:bodyPr>
           <a:lstStyle/>
           <a:p>
             <a:pPr algn="ctr">
-              <a:defRPr sz="1200" b="1">
+              <a:defRPr sz="1100" b="1">
                 <a:solidFill>
                   <a:srgbClr val="BF9A4A"/>
                 </a:solidFill>
@@ -6259,7 +6259,7 @@
         </p:blipFill>
         <p:spPr>
           <a:xfrm>
-            <a:off x="1828800" y="1371600"/>
+            <a:off x="3419856" y="1371600"/>
             <a:ext cx="5760720" cy="3840480"/>
           </a:xfrm>
           <a:prstGeom prst="rect">
@@ -6275,8 +6275,8 @@
         </p:nvSpPr>
         <p:spPr>
           <a:xfrm>
-            <a:off x="914400" y="5349240"/>
-            <a:ext cx="10607040" cy="1325880"/>
+            <a:off x="914400" y="5394960"/>
+            <a:ext cx="10607040" cy="1280159"/>
           </a:xfrm>
           <a:prstGeom prst="rect">
             <a:avLst/>
@@ -6414,8 +6414,8 @@
         </p:nvSpPr>
         <p:spPr>
           <a:xfrm>
-            <a:off x="0" y="6263640"/>
-            <a:ext cx="411480" cy="457200"/>
+            <a:off x="0" y="6309360"/>
+            <a:ext cx="411480" cy="411480"/>
           </a:xfrm>
           <a:prstGeom prst="rect">
             <a:avLst/>
@@ -6423,13 +6423,13 @@
           <a:noFill/>
         </p:spPr>
         <p:txBody>
-          <a:bodyPr wrap="none">
+          <a:bodyPr wrap="none" lIns="0" rIns="0">
             <a:spAutoFit/>
           </a:bodyPr>
           <a:lstStyle/>
           <a:p>
             <a:pPr algn="ctr">
-              <a:defRPr sz="1200" b="1">
+              <a:defRPr sz="1100" b="1">
                 <a:solidFill>
                   <a:srgbClr val="BF9A4A"/>
                 </a:solidFill>
@@ -6536,8 +6536,8 @@
         </p:blipFill>
         <p:spPr>
           <a:xfrm>
-            <a:off x="1828800" y="1371600"/>
-            <a:ext cx="13716000" cy="3840480"/>
+            <a:off x="1133856" y="1371600"/>
+            <a:ext cx="10332720" cy="2893162"/>
           </a:xfrm>
           <a:prstGeom prst="rect">
             <a:avLst/>
@@ -6552,8 +6552,8 @@
         </p:nvSpPr>
         <p:spPr>
           <a:xfrm>
-            <a:off x="914400" y="5349240"/>
-            <a:ext cx="10607040" cy="1325880"/>
+            <a:off x="914400" y="4447641"/>
+            <a:ext cx="10607040" cy="2227478"/>
           </a:xfrm>
           <a:prstGeom prst="rect">
             <a:avLst/>
@@ -6691,8 +6691,8 @@
         </p:nvSpPr>
         <p:spPr>
           <a:xfrm>
-            <a:off x="0" y="6263640"/>
-            <a:ext cx="411480" cy="457200"/>
+            <a:off x="0" y="6309360"/>
+            <a:ext cx="411480" cy="411480"/>
           </a:xfrm>
           <a:prstGeom prst="rect">
             <a:avLst/>
@@ -6700,13 +6700,13 @@
           <a:noFill/>
         </p:spPr>
         <p:txBody>
-          <a:bodyPr wrap="none">
+          <a:bodyPr wrap="none" lIns="0" rIns="0">
             <a:spAutoFit/>
           </a:bodyPr>
           <a:lstStyle/>
           <a:p>
             <a:pPr algn="ctr">
-              <a:defRPr sz="1200" b="1">
+              <a:defRPr sz="1100" b="1">
                 <a:solidFill>
                   <a:srgbClr val="BF9A4A"/>
                 </a:solidFill>
@@ -7184,8 +7184,8 @@
         </p:nvSpPr>
         <p:spPr>
           <a:xfrm>
-            <a:off x="0" y="6263640"/>
-            <a:ext cx="411480" cy="457200"/>
+            <a:off x="0" y="6309360"/>
+            <a:ext cx="411480" cy="411480"/>
           </a:xfrm>
           <a:prstGeom prst="rect">
             <a:avLst/>
@@ -7193,13 +7193,13 @@
           <a:noFill/>
         </p:spPr>
         <p:txBody>
-          <a:bodyPr wrap="none">
+          <a:bodyPr wrap="none" lIns="0" rIns="0">
             <a:spAutoFit/>
           </a:bodyPr>
           <a:lstStyle/>
           <a:p>
             <a:pPr algn="ctr">
-              <a:defRPr sz="1200" b="1">
+              <a:defRPr sz="1100" b="1">
                 <a:solidFill>
                   <a:srgbClr val="BF9A4A"/>
                 </a:solidFill>
@@ -7506,8 +7506,8 @@
         </p:nvSpPr>
         <p:spPr>
           <a:xfrm>
-            <a:off x="0" y="6263640"/>
-            <a:ext cx="411480" cy="457200"/>
+            <a:off x="0" y="6309360"/>
+            <a:ext cx="411480" cy="411480"/>
           </a:xfrm>
           <a:prstGeom prst="rect">
             <a:avLst/>
@@ -7515,13 +7515,13 @@
           <a:noFill/>
         </p:spPr>
         <p:txBody>
-          <a:bodyPr wrap="none">
+          <a:bodyPr wrap="none" lIns="0" rIns="0">
             <a:spAutoFit/>
           </a:bodyPr>
           <a:lstStyle/>
           <a:p>
             <a:pPr algn="ctr">
-              <a:defRPr sz="1200" b="1">
+              <a:defRPr sz="1100" b="1">
                 <a:solidFill>
                   <a:srgbClr val="BF9A4A"/>
                 </a:solidFill>
@@ -7805,8 +7805,8 @@
         </p:nvSpPr>
         <p:spPr>
           <a:xfrm>
-            <a:off x="0" y="6263640"/>
-            <a:ext cx="411480" cy="457200"/>
+            <a:off x="0" y="6309360"/>
+            <a:ext cx="411480" cy="411480"/>
           </a:xfrm>
           <a:prstGeom prst="rect">
             <a:avLst/>
@@ -7814,13 +7814,13 @@
           <a:noFill/>
         </p:spPr>
         <p:txBody>
-          <a:bodyPr wrap="none">
+          <a:bodyPr wrap="none" lIns="0" rIns="0">
             <a:spAutoFit/>
           </a:bodyPr>
           <a:lstStyle/>
           <a:p>
             <a:pPr algn="ctr">
-              <a:defRPr sz="1200" b="1">
+              <a:defRPr sz="1100" b="1">
                 <a:solidFill>
                   <a:srgbClr val="BF9A4A"/>
                 </a:solidFill>
@@ -8104,8 +8104,8 @@
         </p:nvSpPr>
         <p:spPr>
           <a:xfrm>
-            <a:off x="0" y="6263640"/>
-            <a:ext cx="411480" cy="457200"/>
+            <a:off x="0" y="6309360"/>
+            <a:ext cx="411480" cy="411480"/>
           </a:xfrm>
           <a:prstGeom prst="rect">
             <a:avLst/>
@@ -8113,13 +8113,13 @@
           <a:noFill/>
         </p:spPr>
         <p:txBody>
-          <a:bodyPr wrap="none">
+          <a:bodyPr wrap="none" lIns="0" rIns="0">
             <a:spAutoFit/>
           </a:bodyPr>
           <a:lstStyle/>
           <a:p>
             <a:pPr algn="ctr">
-              <a:defRPr sz="1200" b="1">
+              <a:defRPr sz="1100" b="1">
                 <a:solidFill>
                   <a:srgbClr val="BF9A4A"/>
                 </a:solidFill>
@@ -8449,8 +8449,8 @@
         </p:nvSpPr>
         <p:spPr>
           <a:xfrm>
-            <a:off x="0" y="6263640"/>
-            <a:ext cx="411480" cy="457200"/>
+            <a:off x="0" y="6309360"/>
+            <a:ext cx="411480" cy="411480"/>
           </a:xfrm>
           <a:prstGeom prst="rect">
             <a:avLst/>
@@ -8458,13 +8458,13 @@
           <a:noFill/>
         </p:spPr>
         <p:txBody>
-          <a:bodyPr wrap="none">
+          <a:bodyPr wrap="none" lIns="0" rIns="0">
             <a:spAutoFit/>
           </a:bodyPr>
           <a:lstStyle/>
           <a:p>
             <a:pPr algn="ctr">
-              <a:defRPr sz="1200" b="1">
+              <a:defRPr sz="1100" b="1">
                 <a:solidFill>
                   <a:srgbClr val="BF9A4A"/>
                 </a:solidFill>
@@ -8771,8 +8771,8 @@
         </p:nvSpPr>
         <p:spPr>
           <a:xfrm>
-            <a:off x="0" y="6263640"/>
-            <a:ext cx="411480" cy="457200"/>
+            <a:off x="0" y="6309360"/>
+            <a:ext cx="411480" cy="411480"/>
           </a:xfrm>
           <a:prstGeom prst="rect">
             <a:avLst/>
@@ -8780,13 +8780,13 @@
           <a:noFill/>
         </p:spPr>
         <p:txBody>
-          <a:bodyPr wrap="none">
+          <a:bodyPr wrap="none" lIns="0" rIns="0">
             <a:spAutoFit/>
           </a:bodyPr>
           <a:lstStyle/>
           <a:p>
             <a:pPr algn="ctr">
-              <a:defRPr sz="1200" b="1">
+              <a:defRPr sz="1100" b="1">
                 <a:solidFill>
                   <a:srgbClr val="BF9A4A"/>
                 </a:solidFill>
@@ -9093,8 +9093,8 @@
         </p:nvSpPr>
         <p:spPr>
           <a:xfrm>
-            <a:off x="0" y="6263640"/>
-            <a:ext cx="411480" cy="457200"/>
+            <a:off x="0" y="6309360"/>
+            <a:ext cx="411480" cy="411480"/>
           </a:xfrm>
           <a:prstGeom prst="rect">
             <a:avLst/>
@@ -9102,13 +9102,13 @@
           <a:noFill/>
         </p:spPr>
         <p:txBody>
-          <a:bodyPr wrap="none">
+          <a:bodyPr wrap="none" lIns="0" rIns="0">
             <a:spAutoFit/>
           </a:bodyPr>
           <a:lstStyle/>
           <a:p>
             <a:pPr algn="ctr">
-              <a:defRPr sz="1200" b="1">
+              <a:defRPr sz="1100" b="1">
                 <a:solidFill>
                   <a:srgbClr val="BF9A4A"/>
                 </a:solidFill>
@@ -9415,8 +9415,8 @@
         </p:nvSpPr>
         <p:spPr>
           <a:xfrm>
-            <a:off x="0" y="6263640"/>
-            <a:ext cx="411480" cy="457200"/>
+            <a:off x="0" y="6309360"/>
+            <a:ext cx="411480" cy="411480"/>
           </a:xfrm>
           <a:prstGeom prst="rect">
             <a:avLst/>
@@ -9424,13 +9424,13 @@
           <a:noFill/>
         </p:spPr>
         <p:txBody>
-          <a:bodyPr wrap="none">
+          <a:bodyPr wrap="none" lIns="0" rIns="0">
             <a:spAutoFit/>
           </a:bodyPr>
           <a:lstStyle/>
           <a:p>
             <a:pPr algn="ctr">
-              <a:defRPr sz="1200" b="1">
+              <a:defRPr sz="1100" b="1">
                 <a:solidFill>
                   <a:srgbClr val="BF9A4A"/>
                 </a:solidFill>

--- a/slides/presentation_v2.pptx
+++ b/slides/presentation_v2.pptx
@@ -22,6 +22,7 @@
     <p:sldId id="270" r:id="rId22"/>
     <p:sldId id="271" r:id="rId23"/>
     <p:sldId id="272" r:id="rId24"/>
+    <p:sldId id="273" r:id="rId25"/>
   </p:sldIdLst>
   <p:sldSz cx="12188952" cy="6858000" type="screen4x3"/>
   <p:notesSz cx="6858000" cy="9144000"/>
@@ -588,7 +589,7 @@
           <a:lstStyle/>
           <a:p>
             <a:r>
-              <a:t>Nhấn tính anti-monotone — CORI dùng nó để cắt tỉa cả nhánh. (1:00)</a:t>
+              <a:t>Chuyển mạch sang nửa sau: hiếm thôi chưa đủ, còn cần 'thật'. (0:45)</a:t>
             </a:r>
           </a:p>
         </p:txBody>
@@ -658,7 +659,7 @@
           <a:lstStyle/>
           <a:p>
             <a:r>
-              <a:t>Mẫu hiếm chỉ chạm phần rất nhỏ dữ liệu, còn lại toàn null transactions — độ đo nhạy với chúng bị bóp méo trên dữ liệu thưa. (0:45)</a:t>
+              <a:t>Nhấn tính anti-monotone — CORI dùng nó để cắt tỉa cả nhánh. (1:00)</a:t>
             </a:r>
           </a:p>
         </p:txBody>
@@ -728,7 +729,7 @@
           <a:lstStyle/>
           <a:p>
             <a:r>
-              <a:t>Khi nối hai itemset: TID-List lấy giao, DTID-List lấy hợp — support và bond tính ngay. Nút chưa hiếm vẫn phải mở rộng. (1:15)</a:t>
+              <a:t>Mẫu hiếm chỉ chạm phần rất nhỏ dữ liệu, còn lại toàn null transactions — độ đo nhạy với chúng bị bóp méo trên dữ liệu thưa. (0:45)</a:t>
             </a:r>
           </a:p>
         </p:txBody>
@@ -798,7 +799,7 @@
           <a:lstStyle/>
           <a:p>
             <a:r>
-              <a:t>19 assert phủ toàn bộ: bảng FIM, ba thuật toán, bond, all-confidence, TID/DTID-List — tất cả khớp kết quả tính tay trên ví dụ minh họa. (1:00)</a:t>
+              <a:t>Khi nối hai itemset: TID-List lấy giao, DTID-List lấy hợp — support và bond tính ngay. Nút chưa hiếm vẫn phải mở rộng. (1:15)</a:t>
             </a:r>
           </a:p>
         </p:txBody>
@@ -868,7 +869,7 @@
           <a:lstStyle/>
           <a:p>
             <a:r>
-              <a:t>Thời gian AprioriRare tăng theo cấp mũ khi minsup giảm. mRI gọn nhưng chi phí bị chi phối bởi vùng phổ biến. (1:00)</a:t>
+              <a:t>19 assert phủ toàn bộ: bảng FIM, ba thuật toán, bond, all-confidence, TID/DTID-List — tất cả khớp kết quả tính tay trên ví dụ minh họa. (1:00)</a:t>
             </a:r>
           </a:p>
         </p:txBody>
@@ -938,7 +939,7 @@
           <a:lstStyle/>
           <a:p>
             <a:r>
-              <a:t>Mẫu đắt giá nhất: 36 cây nấm mùi mốc luôn đồng thời không vòng cuống + cuống màu quế — bond = 1 tuyệt đối, FIM không bao giờ chạm tới. (1:15)</a:t>
+              <a:t>Thời gian AprioriRare tăng theo cấp mũ khi minsup giảm. mRI gọn nhưng chi phí bị chi phối bởi vùng phổ biến. (1:00)</a:t>
             </a:r>
           </a:p>
         </p:txBody>
@@ -1008,7 +1009,7 @@
           <a:lstStyle/>
           <a:p>
             <a:r>
-              <a:t>Thông điệp: không có định nghĩa hiếm 'đúng' duy nhất — chỉ có đánh đổi; null-invariance là bắt buộc trên dữ liệu thưa. (0:50)</a:t>
+              <a:t>Mẫu đắt giá nhất: 36 cây nấm mùi mốc luôn đồng thời không vòng cuống + cuống màu quế — bond = 1 tuyệt đối, FIM không bao giờ chạm tới. (1:15)</a:t>
             </a:r>
           </a:p>
         </p:txBody>
@@ -1078,6 +1079,76 @@
           <a:lstStyle/>
           <a:p>
             <a:r>
+              <a:t>Thông điệp: không có định nghĩa hiếm 'đúng' duy nhất — chỉ có đánh đổi; null-invariance là bắt buộc trên dữ liệu thưa. (0:50)</a:t>
+            </a:r>
+          </a:p>
+        </p:txBody>
+      </p:sp>
+      <p:sp>
+        <p:nvSpPr>
+          <p:cNvPr id="4" name="Slide Number Placeholder 3"/>
+          <p:cNvSpPr>
+            <a:spLocks noGrp="1"/>
+          </p:cNvSpPr>
+          <p:nvPr>
+            <p:ph type="sldNum" idx="5" sz="quarter"/>
+          </p:nvPr>
+        </p:nvSpPr>
+        <p:spPr/>
+      </p:sp>
+    </p:spTree>
+  </p:cSld>
+  <p:clrMapOvr>
+    <a:masterClrMapping/>
+  </p:clrMapOvr>
+</p:notes>
+</file>
+
+<file path=ppt/notesSlides/notesSlide18.xml><?xml version="1.0" encoding="utf-8"?>
+<p:notes xmlns:a="http://schemas.openxmlformats.org/drawingml/2006/main" xmlns:p="http://schemas.openxmlformats.org/presentationml/2006/main" xmlns:r="http://schemas.openxmlformats.org/officeDocument/2006/relationships">
+  <p:cSld>
+    <p:spTree>
+      <p:nvGrpSpPr>
+        <p:cNvPr id="1" name=""/>
+        <p:cNvGrpSpPr/>
+        <p:nvPr/>
+      </p:nvGrpSpPr>
+      <p:grpSpPr>
+        <a:xfrm>
+          <a:off x="0" y="0"/>
+          <a:ext cx="0" cy="0"/>
+          <a:chOff x="0" y="0"/>
+          <a:chExt cx="0" cy="0"/>
+        </a:xfrm>
+      </p:grpSpPr>
+      <p:sp>
+        <p:nvSpPr>
+          <p:cNvPr id="2" name="Slide Image Placeholder 1"/>
+          <p:cNvSpPr>
+            <a:spLocks noGrp="1"/>
+          </p:cNvSpPr>
+          <p:nvPr>
+            <p:ph type="sldImg" idx="2"/>
+          </p:nvPr>
+        </p:nvSpPr>
+        <p:spPr/>
+      </p:sp>
+      <p:sp>
+        <p:nvSpPr>
+          <p:cNvPr id="3" name="Notes Placeholder 2"/>
+          <p:cNvSpPr>
+            <a:spLocks noGrp="1"/>
+          </p:cNvSpPr>
+          <p:nvPr>
+            <p:ph type="body" idx="3" sz="quarter"/>
+          </p:nvPr>
+        </p:nvSpPr>
+        <p:spPr/>
+        <p:txBody>
+          <a:bodyPr/>
+          <a:lstStyle/>
+          <a:p>
+            <a:r>
               <a:t>Cảm ơn, mời câu hỏi. Chuẩn bị sẵn Q&amp;A trong TALK_SCRIPT.md. (0:20)</a:t>
             </a:r>
           </a:p>
@@ -1428,7 +1499,7 @@
           <a:lstStyle/>
           <a:p>
             <a:r>
-              <a:t>Tâm điểm lý thuyết — hình ảnh 'đường biên' trong dàn itemset. mRI nhỏ gọn mà đại diện mọi mẫu hiếm; PRI thêm ngưỡng dưới loại nhiễu. (1:15)</a:t>
+              <a:t>Bản đồ toàn bài trên ví dụ 4 giao dịch: từ CSDL thô → định nghĩa hiếm (minsup) → thuật toán khai thác → độ đo lọc mẫu giả → CORI. Khán giả định vị được mình đang ở khối nào trong suốt phần còn lại. (0:40)</a:t>
             </a:r>
           </a:p>
         </p:txBody>
@@ -1498,7 +1569,7 @@
           <a:lstStyle/>
           <a:p>
             <a:r>
-              <a:t>Qua prune nghĩa là mọi tập con đều phổ biến → không phổ biến là tự động thành mRI. Nhược điểm chi phí định lượng ở Exp A. (1:15)</a:t>
+              <a:t>Tâm điểm lý thuyết — hình ảnh 'đường biên' trong dàn itemset. mRI nhỏ gọn mà đại diện mọi mẫu hiếm; PRI thêm ngưỡng dưới loại nhiễu. (1:15)</a:t>
             </a:r>
           </a:p>
         </p:txBody>
@@ -1568,7 +1639,7 @@
           <a:lstStyle/>
           <a:p>
             <a:r>
-              <a:t>Không gian nhỏ hơn hẳn; cái giá là bỏ sót mẫu lai như {bệnh hiếm + triệu chứng phổ biến}. (1:00)</a:t>
+              <a:t>Qua prune nghĩa là mọi tập con đều phổ biến → không phổ biến là tự động thành mRI. Nhược điểm chi phí định lượng ở Exp A. (1:15)</a:t>
             </a:r>
           </a:p>
         </p:txBody>
@@ -1638,7 +1709,7 @@
           <a:lstStyle/>
           <a:p>
             <a:r>
-              <a:t>Chuyển mạch sang nửa sau: hiếm thôi chưa đủ, còn cần 'thật'. (0:45)</a:t>
+              <a:t>Không gian nhỏ hơn hẳn; cái giá là bỏ sót mẫu lai như {bệnh hiếm + triệu chứng phổ biến}. (1:00)</a:t>
             </a:r>
           </a:p>
         </p:txBody>
@@ -4917,7 +4988,7 @@
               </a:defRPr>
             </a:pPr>
             <a:r>
-              <a:t>10/17</a:t>
+              <a:t>10/18</a:t>
             </a:r>
           </a:p>
         </p:txBody>
@@ -4952,7 +5023,7 @@
               </a:defRPr>
             </a:pPr>
             <a:r>
-              <a:t>Hai độ đo: bond và all-confidence</a:t>
+              <a:t>Mẫu giả: phổ biến ≠ đáng tin</a:t>
             </a:r>
           </a:p>
         </p:txBody>
@@ -5037,12 +5108,12 @@
               <a:t>◆  </a:t>
             </a:r>
             <a:r>
-              <a:rPr sz="2000" b="0">
+              <a:rPr sz="2000" b="1">
                 <a:solidFill>
                   <a:srgbClr val="2C2C2C"/>
                 </a:solidFill>
               </a:rPr>
-              <a:t>bond(X) = sup(X) / dsup(X) — tỉ lệ giao dịch 'liên quan' chứa toàn bộ X</a:t>
+              <a:t>{pasta, cake} xuất hiện ở 50% giao dịch</a:t>
             </a:r>
           </a:p>
           <a:p>
@@ -5060,12 +5131,12 @@
               <a:t>◆  </a:t>
             </a:r>
             <a:r>
-              <a:rPr sz="2000" b="1">
+              <a:rPr sz="2000" b="0">
                 <a:solidFill>
                   <a:srgbClr val="2C2C2C"/>
                 </a:solidFill>
               </a:rPr>
-              <a:t>bond = 1: các mục luôn đi cùng nhau</a:t>
+              <a:t>Nhưng pasta có mặt trong mọi giao dịch</a:t>
             </a:r>
           </a:p>
           <a:p>
@@ -5085,10 +5156,10 @@
             <a:r>
               <a:rPr sz="2000" b="0">
                 <a:solidFill>
-                  <a:srgbClr val="2C2C2C"/>
-                </a:solidFill>
-              </a:rPr>
-              <a:t>allconf(X) = sup(X) / max sup(item) — confidence nhỏ nhất của mọi luật từ X</a:t>
+                  <a:srgbClr val="C15937"/>
+                </a:solidFill>
+              </a:rPr>
+              <a:t>Đồng xuất hiện là tất yếu — không có liên hệ thật (spurious)</a:t>
             </a:r>
           </a:p>
           <a:p>
@@ -5106,35 +5177,12 @@
               <a:t>◆  </a:t>
             </a:r>
             <a:r>
-              <a:rPr sz="2000" b="1">
+              <a:rPr sz="2000" b="0">
                 <a:solidFill>
                   <a:srgbClr val="997929"/>
                 </a:solidFill>
               </a:rPr>
-              <a:t>Cả hai: = 1 với itemset đơn; anti-monotone → cắt tỉa kiểu Apriori</a:t>
-            </a:r>
-          </a:p>
-          <a:p>
-            <a:pPr>
-              <a:spcAft>
-                <a:spcPts val="1200"/>
-              </a:spcAft>
-            </a:pPr>
-            <a:r>
-              <a:rPr sz="2000" b="1">
-                <a:solidFill>
-                  <a:srgbClr val="997929"/>
-                </a:solidFill>
-              </a:rPr>
-              <a:t>◆  </a:t>
-            </a:r>
-            <a:r>
-              <a:rPr sz="2000" b="0">
-                <a:solidFill>
-                  <a:srgbClr val="2C2C2C"/>
-                </a:solidFill>
-              </a:rPr>
-              <a:t>Ví dụ: bond({cake, bread}) = 0   •   bond({pasta, orange}) = 3/4</a:t>
+              <a:t>Cần độ đo tương quan để lọc</a:t>
             </a:r>
           </a:p>
         </p:txBody>
@@ -5239,7 +5287,7 @@
               </a:defRPr>
             </a:pPr>
             <a:r>
-              <a:t>11/17</a:t>
+              <a:t>11/18</a:t>
             </a:r>
           </a:p>
         </p:txBody>
@@ -5274,7 +5322,7 @@
               </a:defRPr>
             </a:pPr>
             <a:r>
-              <a:t>Null-invariance: vì sao lift thất bại</a:t>
+              <a:t>Hai độ đo: bond và all-confidence</a:t>
             </a:r>
           </a:p>
         </p:txBody>
@@ -5364,7 +5412,7 @@
                   <a:srgbClr val="2C2C2C"/>
                 </a:solidFill>
               </a:rPr>
-              <a:t>Null transaction: giao dịch không chứa mục nào của mẫu</a:t>
+              <a:t>bond(X) = sup(X) / dsup(X) — tỉ lệ giao dịch 'liên quan' chứa toàn bộ X</a:t>
             </a:r>
           </a:p>
           <a:p>
@@ -5382,12 +5430,12 @@
               <a:t>◆  </a:t>
             </a:r>
             <a:r>
-              <a:rPr sz="2000" b="0">
-                <a:solidFill>
-                  <a:srgbClr val="C15937"/>
-                </a:solidFill>
-              </a:rPr>
-              <a:t>χ², lift bị bóp méo bởi hàng triệu giao dịch không liên quan</a:t>
+              <a:rPr sz="2000" b="1">
+                <a:solidFill>
+                  <a:srgbClr val="2C2C2C"/>
+                </a:solidFill>
+              </a:rPr>
+              <a:t>bond = 1: các mục luôn đi cùng nhau</a:t>
             </a:r>
           </a:p>
           <a:p>
@@ -5405,12 +5453,12 @@
               <a:t>◆  </a:t>
             </a:r>
             <a:r>
-              <a:rPr sz="2000" b="1">
+              <a:rPr sz="2000" b="0">
                 <a:solidFill>
                   <a:srgbClr val="2C2C2C"/>
                 </a:solidFill>
               </a:rPr>
-              <a:t>bond, all-confidence, cosine, Kulczynski: null-invariant</a:t>
+              <a:t>allconf(X) = sup(X) / max sup(item) — confidence nhỏ nhất của mọi luật từ X</a:t>
             </a:r>
           </a:p>
           <a:p>
@@ -5433,7 +5481,30 @@
                   <a:srgbClr val="997929"/>
                 </a:solidFill>
               </a:rPr>
-              <a:t>Mẫu hiếm ⊂ phần rất nhỏ dữ liệu → bắt buộc dùng null-invariant</a:t>
+              <a:t>Cả hai: = 1 với itemset đơn; anti-monotone → cắt tỉa kiểu Apriori</a:t>
+            </a:r>
+          </a:p>
+          <a:p>
+            <a:pPr>
+              <a:spcAft>
+                <a:spcPts val="1200"/>
+              </a:spcAft>
+            </a:pPr>
+            <a:r>
+              <a:rPr sz="2000" b="1">
+                <a:solidFill>
+                  <a:srgbClr val="997929"/>
+                </a:solidFill>
+              </a:rPr>
+              <a:t>◆  </a:t>
+            </a:r>
+            <a:r>
+              <a:rPr sz="2000" b="0">
+                <a:solidFill>
+                  <a:srgbClr val="2C2C2C"/>
+                </a:solidFill>
+              </a:rPr>
+              <a:t>Ví dụ: bond({cake, bread}) = 0   •   bond({pasta, orange}) = 3/4</a:t>
             </a:r>
           </a:p>
         </p:txBody>
@@ -5538,7 +5609,7 @@
               </a:defRPr>
             </a:pPr>
             <a:r>
-              <a:t>12/17</a:t>
+              <a:t>12/18</a:t>
             </a:r>
           </a:p>
         </p:txBody>
@@ -5573,7 +5644,7 @@
               </a:defRPr>
             </a:pPr>
             <a:r>
-              <a:t>CORI: hiếm + tương quan trong một lần duyệt</a:t>
+              <a:t>Null-invariance: vì sao lift thất bại</a:t>
             </a:r>
           </a:p>
         </p:txBody>
@@ -5658,12 +5729,12 @@
               <a:t>◆  </a:t>
             </a:r>
             <a:r>
-              <a:rPr sz="2000" b="1">
+              <a:rPr sz="2000" b="0">
                 <a:solidFill>
                   <a:srgbClr val="2C2C2C"/>
                 </a:solidFill>
               </a:rPr>
-              <a:t>Rare correlated: sup(X) &lt; maxsup VÀ bond(X) ≥ minbond</a:t>
+              <a:t>Null transaction: giao dịch không chứa mục nào của mẫu</a:t>
             </a:r>
           </a:p>
           <a:p>
@@ -5683,10 +5754,10 @@
             <a:r>
               <a:rPr sz="2000" b="0">
                 <a:solidFill>
-                  <a:srgbClr val="2C2C2C"/>
-                </a:solidFill>
-              </a:rPr>
-              <a:t>Hai ràng buộc đối ngẫu: hiếm = monotone • bond = anti-monotone</a:t>
+                  <a:srgbClr val="C15937"/>
+                </a:solidFill>
+              </a:rPr>
+              <a:t>χ², lift bị bóp méo bởi hàng triệu giao dịch không liên quan</a:t>
             </a:r>
           </a:p>
           <a:p>
@@ -5704,12 +5775,12 @@
               <a:t>◆  </a:t>
             </a:r>
             <a:r>
-              <a:rPr sz="2000" b="0">
+              <a:rPr sz="2000" b="1">
                 <a:solidFill>
                   <a:srgbClr val="2C2C2C"/>
                 </a:solidFill>
               </a:rPr>
-              <a:t>Duyệt kiểu Eclat, mỗi itemset giữ TID-List + DTID-List</a:t>
+              <a:t>bond, all-confidence, cosine, Kulczynski: null-invariant</a:t>
             </a:r>
           </a:p>
           <a:p>
@@ -5727,35 +5798,12 @@
               <a:t>◆  </a:t>
             </a:r>
             <a:r>
-              <a:rPr sz="2000" b="0">
-                <a:solidFill>
-                  <a:srgbClr val="2C2C2C"/>
-                </a:solidFill>
-              </a:rPr>
-              <a:t>bond rớt ngưỡng → cắt cả nhánh; sup ≥ maxsup → chưa xuất nhưng vẫn mở rộng</a:t>
-            </a:r>
-          </a:p>
-          <a:p>
-            <a:pPr>
-              <a:spcAft>
-                <a:spcPts val="1200"/>
-              </a:spcAft>
-            </a:pPr>
-            <a:r>
               <a:rPr sz="2000" b="1">
                 <a:solidFill>
                   <a:srgbClr val="997929"/>
                 </a:solidFill>
               </a:rPr>
-              <a:t>◆  </a:t>
-            </a:r>
-            <a:r>
-              <a:rPr sz="2000" b="0">
-                <a:solidFill>
-                  <a:srgbClr val="40695B"/>
-                </a:solidFill>
-              </a:rPr>
-              <a:t>Ví dụ (3, 0.6): {bread}, {cake}, {orange, cake}  ✓ khớp bài giảng</a:t>
+              <a:t>Mẫu hiếm ⊂ phần rất nhỏ dữ liệu → bắt buộc dùng null-invariant</a:t>
             </a:r>
           </a:p>
         </p:txBody>
@@ -5860,7 +5908,7 @@
               </a:defRPr>
             </a:pPr>
             <a:r>
-              <a:t>13/17</a:t>
+              <a:t>13/18</a:t>
             </a:r>
           </a:p>
         </p:txBody>
@@ -5895,7 +5943,7 @@
               </a:defRPr>
             </a:pPr>
             <a:r>
-              <a:t>Cài đặt &amp; kiểm chứng 100%</a:t>
+              <a:t>CORI: hiếm + tương quan trong một lần duyệt</a:t>
             </a:r>
           </a:p>
         </p:txBody>
@@ -5980,12 +6028,12 @@
               <a:t>◆  </a:t>
             </a:r>
             <a:r>
-              <a:rPr sz="2000" b="0">
+              <a:rPr sz="2000" b="1">
                 <a:solidFill>
                   <a:srgbClr val="2C2C2C"/>
                 </a:solidFill>
               </a:rPr>
-              <a:t>Python 3.13, chỉ thư viện chuẩn; TID-set dùng chung cho cả 3 thuật toán</a:t>
+              <a:t>Rare correlated: sup(X) &lt; maxsup VÀ bond(X) ≥ minbond</a:t>
             </a:r>
           </a:p>
           <a:p>
@@ -6003,12 +6051,12 @@
               <a:t>◆  </a:t>
             </a:r>
             <a:r>
-              <a:rPr sz="2000" b="1">
-                <a:solidFill>
-                  <a:srgbClr val="40695B"/>
-                </a:solidFill>
-              </a:rPr>
-              <a:t>19 assert đối chiếu từng con số kỳ vọng trên ví dụ — 100% ĐẠT</a:t>
+              <a:rPr sz="2000" b="0">
+                <a:solidFill>
+                  <a:srgbClr val="2C2C2C"/>
+                </a:solidFill>
+              </a:rPr>
+              <a:t>Hai ràng buộc đối ngẫu: hiếm = monotone • bond = anti-monotone</a:t>
             </a:r>
           </a:p>
           <a:p>
@@ -6031,7 +6079,7 @@
                   <a:srgbClr val="2C2C2C"/>
                 </a:solidFill>
               </a:rPr>
-              <a:t>Phủ FIM, AprioriRare, AprioriInverse, CORI &amp; các độ đo</a:t>
+              <a:t>Duyệt kiểu Eclat, mỗi itemset giữ TID-List + DTID-List</a:t>
             </a:r>
           </a:p>
           <a:p>
@@ -6054,7 +6102,30 @@
                   <a:srgbClr val="2C2C2C"/>
                 </a:solidFill>
               </a:rPr>
-              <a:t>{pasta, cake}: lift = 1.0, bond = 0.5 → xác nhận mẫu giả bằng số</a:t>
+              <a:t>bond rớt ngưỡng → cắt cả nhánh; sup ≥ maxsup → chưa xuất nhưng vẫn mở rộng</a:t>
+            </a:r>
+          </a:p>
+          <a:p>
+            <a:pPr>
+              <a:spcAft>
+                <a:spcPts val="1200"/>
+              </a:spcAft>
+            </a:pPr>
+            <a:r>
+              <a:rPr sz="2000" b="1">
+                <a:solidFill>
+                  <a:srgbClr val="997929"/>
+                </a:solidFill>
+              </a:rPr>
+              <a:t>◆  </a:t>
+            </a:r>
+            <a:r>
+              <a:rPr sz="2000" b="0">
+                <a:solidFill>
+                  <a:srgbClr val="40695B"/>
+                </a:solidFill>
+              </a:rPr>
+              <a:t>Ví dụ (3, 0.6): {bread}, {cake}, {orange, cake}  ✓ khớp bài giảng</a:t>
             </a:r>
           </a:p>
         </p:txBody>
@@ -6159,7 +6230,7 @@
               </a:defRPr>
             </a:pPr>
             <a:r>
-              <a:t>14/17</a:t>
+              <a:t>14/18</a:t>
             </a:r>
           </a:p>
         </p:txBody>
@@ -6194,7 +6265,7 @@
               </a:defRPr>
             </a:pPr>
             <a:r>
-              <a:t>Exp A — Cái giá của việc đi xuyên vùng phổ biến</a:t>
+              <a:t>Cài đặt &amp; kiểm chứng 100%</a:t>
             </a:r>
           </a:p>
         </p:txBody>
@@ -6243,40 +6314,16 @@
           </a:p>
         </p:txBody>
       </p:sp>
-      <p:pic>
-        <p:nvPicPr>
-          <p:cNvPr id="6" name="Picture 5" descr="mushroom_runtime.png"/>
-          <p:cNvPicPr>
-            <a:picLocks noChangeAspect="1"/>
-          </p:cNvPicPr>
-          <p:nvPr/>
-        </p:nvPicPr>
-        <p:blipFill>
-          <a:blip r:embed="rId2"/>
-          <a:stretch>
-            <a:fillRect/>
-          </a:stretch>
-        </p:blipFill>
-        <p:spPr>
-          <a:xfrm>
-            <a:off x="3419856" y="1371600"/>
-            <a:ext cx="5760720" cy="3840480"/>
-          </a:xfrm>
-          <a:prstGeom prst="rect">
-            <a:avLst/>
-          </a:prstGeom>
-        </p:spPr>
-      </p:pic>
-      <p:sp>
-        <p:nvSpPr>
-          <p:cNvPr id="7" name="TextBox 6"/>
+      <p:sp>
+        <p:nvSpPr>
+          <p:cNvPr id="6" name="TextBox 5"/>
           <p:cNvSpPr txBox="1"/>
           <p:nvPr/>
         </p:nvSpPr>
         <p:spPr>
           <a:xfrm>
-            <a:off x="914400" y="5394960"/>
-            <a:ext cx="10607040" cy="1280159"/>
+            <a:off x="914400" y="1371600"/>
+            <a:ext cx="10607040" cy="5029200"/>
           </a:xfrm>
           <a:prstGeom prst="rect">
             <a:avLst/>
@@ -6291,11 +6338,11 @@
           <a:p>
             <a:pPr>
               <a:spcAft>
-                <a:spcPts val="600"/>
+                <a:spcPts val="1200"/>
               </a:spcAft>
             </a:pPr>
             <a:r>
-              <a:rPr sz="1500" b="1">
+              <a:rPr sz="2000" b="1">
                 <a:solidFill>
                   <a:srgbClr val="997929"/>
                 </a:solidFill>
@@ -6303,22 +6350,22 @@
               <a:t>◆  </a:t>
             </a:r>
             <a:r>
-              <a:rPr sz="1500" b="0">
+              <a:rPr sz="2000" b="0">
                 <a:solidFill>
                   <a:srgbClr val="2C2C2C"/>
                 </a:solidFill>
               </a:rPr>
-              <a:t>UCI Mushroom: 8 124 giao dịch, 118 item (dữ liệu dày)</a:t>
+              <a:t>Python 3.13, chỉ thư viện chuẩn; TID-set dùng chung cho cả 3 thuật toán</a:t>
             </a:r>
           </a:p>
           <a:p>
             <a:pPr>
               <a:spcAft>
-                <a:spcPts val="600"/>
+                <a:spcPts val="1200"/>
               </a:spcAft>
             </a:pPr>
             <a:r>
-              <a:rPr sz="1500" b="1">
+              <a:rPr sz="2000" b="1">
                 <a:solidFill>
                   <a:srgbClr val="997929"/>
                 </a:solidFill>
@@ -6326,12 +6373,58 @@
               <a:t>◆  </a:t>
             </a:r>
             <a:r>
-              <a:rPr sz="1500" b="1">
+              <a:rPr sz="2000" b="1">
+                <a:solidFill>
+                  <a:srgbClr val="40695B"/>
+                </a:solidFill>
+              </a:rPr>
+              <a:t>19 assert đối chiếu từng con số kỳ vọng trên ví dụ — 100% ĐẠT</a:t>
+            </a:r>
+          </a:p>
+          <a:p>
+            <a:pPr>
+              <a:spcAft>
+                <a:spcPts val="1200"/>
+              </a:spcAft>
+            </a:pPr>
+            <a:r>
+              <a:rPr sz="2000" b="1">
+                <a:solidFill>
+                  <a:srgbClr val="997929"/>
+                </a:solidFill>
+              </a:rPr>
+              <a:t>◆  </a:t>
+            </a:r>
+            <a:r>
+              <a:rPr sz="2000" b="0">
                 <a:solidFill>
                   <a:srgbClr val="2C2C2C"/>
                 </a:solidFill>
               </a:rPr>
-              <a:t>minsup 0.6 → 0.2: #frequent tăng ~890× (51 → 45 391); #mRI chỉ ~8× (122 → 986)</a:t>
+              <a:t>Phủ FIM, AprioriRare, AprioriInverse, CORI &amp; các độ đo</a:t>
+            </a:r>
+          </a:p>
+          <a:p>
+            <a:pPr>
+              <a:spcAft>
+                <a:spcPts val="1200"/>
+              </a:spcAft>
+            </a:pPr>
+            <a:r>
+              <a:rPr sz="2000" b="1">
+                <a:solidFill>
+                  <a:srgbClr val="997929"/>
+                </a:solidFill>
+              </a:rPr>
+              <a:t>◆  </a:t>
+            </a:r>
+            <a:r>
+              <a:rPr sz="2000" b="0">
+                <a:solidFill>
+                  <a:srgbClr val="2C2C2C"/>
+                </a:solidFill>
+              </a:rPr>
+              <a:t>{pasta, cake}: lift = 1.0, bond = 0.5 → xác nhận mẫu giả bằng số</a:t>
             </a:r>
           </a:p>
         </p:txBody>
@@ -6436,7 +6529,7 @@
               </a:defRPr>
             </a:pPr>
             <a:r>
-              <a:t>15/17</a:t>
+              <a:t>15/18</a:t>
             </a:r>
           </a:p>
         </p:txBody>
@@ -6471,7 +6564,7 @@
               </a:defRPr>
             </a:pPr>
             <a:r>
-              <a:t>Exp B &amp; C — PRI rẻ, CORI giàu ngữ nghĩa</a:t>
+              <a:t>Exp A — Cái giá của việc đi xuyên vùng phổ biến</a:t>
             </a:r>
           </a:p>
         </p:txBody>
@@ -6522,7 +6615,7 @@
       </p:sp>
       <p:pic>
         <p:nvPicPr>
-          <p:cNvPr id="6" name="Picture 5" descr="mushroom_experiments.png"/>
+          <p:cNvPr id="6" name="Picture 5" descr="mushroom_runtime.png"/>
           <p:cNvPicPr>
             <a:picLocks noChangeAspect="1"/>
           </p:cNvPicPr>
@@ -6536,8 +6629,8 @@
         </p:blipFill>
         <p:spPr>
           <a:xfrm>
-            <a:off x="1133856" y="1371600"/>
-            <a:ext cx="10332720" cy="2893162"/>
+            <a:off x="3419856" y="1371600"/>
+            <a:ext cx="5760720" cy="3840480"/>
           </a:xfrm>
           <a:prstGeom prst="rect">
             <a:avLst/>
@@ -6552,8 +6645,8 @@
         </p:nvSpPr>
         <p:spPr>
           <a:xfrm>
-            <a:off x="914400" y="4447641"/>
-            <a:ext cx="10607040" cy="2227478"/>
+            <a:off x="914400" y="5394960"/>
+            <a:ext cx="10607040" cy="1280159"/>
           </a:xfrm>
           <a:prstGeom prst="rect">
             <a:avLst/>
@@ -6585,7 +6678,7 @@
                   <a:srgbClr val="2C2C2C"/>
                 </a:solidFill>
               </a:rPr>
-              <a:t>AprioriInverse: mili-giây — alphabet hiếm rất nhỏ (không phải benchmark cùng điều kiện)</a:t>
+              <a:t>UCI Mushroom: 8 124 giao dịch, 118 item (dữ liệu dày)</a:t>
             </a:r>
           </a:p>
           <a:p>
@@ -6608,7 +6701,7 @@
                   <a:srgbClr val="2C2C2C"/>
                 </a:solidFill>
               </a:rPr>
-              <a:t>CORI: bão hòa 90–104 mẫu khi nới minbond 0.95 → 0.5; mẫu bond = 1.0: {odor=m, …}, sup = 36 (0.44%)</a:t>
+              <a:t>minsup 0.6 → 0.2: #frequent tăng ~890× (51 → 45 391); #mRI chỉ ~8× (122 → 986)</a:t>
             </a:r>
           </a:p>
         </p:txBody>
@@ -6713,7 +6806,7 @@
               </a:defRPr>
             </a:pPr>
             <a:r>
-              <a:t>16/17</a:t>
+              <a:t>16/18</a:t>
             </a:r>
           </a:p>
         </p:txBody>
@@ -6748,7 +6841,7 @@
               </a:defRPr>
             </a:pPr>
             <a:r>
-              <a:t>Kết luận: ba đánh đổi</a:t>
+              <a:t>Exp B &amp; C — PRI rẻ, CORI giàu ngữ nghĩa</a:t>
             </a:r>
           </a:p>
         </p:txBody>
@@ -6797,16 +6890,40 @@
           </a:p>
         </p:txBody>
       </p:sp>
-      <p:sp>
-        <p:nvSpPr>
-          <p:cNvPr id="6" name="TextBox 5"/>
+      <p:pic>
+        <p:nvPicPr>
+          <p:cNvPr id="6" name="Picture 5" descr="mushroom_experiments.png"/>
+          <p:cNvPicPr>
+            <a:picLocks noChangeAspect="1"/>
+          </p:cNvPicPr>
+          <p:nvPr/>
+        </p:nvPicPr>
+        <p:blipFill>
+          <a:blip r:embed="rId2"/>
+          <a:stretch>
+            <a:fillRect/>
+          </a:stretch>
+        </p:blipFill>
+        <p:spPr>
+          <a:xfrm>
+            <a:off x="1133856" y="1371600"/>
+            <a:ext cx="10332720" cy="2893162"/>
+          </a:xfrm>
+          <a:prstGeom prst="rect">
+            <a:avLst/>
+          </a:prstGeom>
+        </p:spPr>
+      </p:pic>
+      <p:sp>
+        <p:nvSpPr>
+          <p:cNvPr id="7" name="TextBox 6"/>
           <p:cNvSpPr txBox="1"/>
           <p:nvPr/>
         </p:nvSpPr>
         <p:spPr>
           <a:xfrm>
-            <a:off x="914400" y="1371600"/>
-            <a:ext cx="10607040" cy="5029200"/>
+            <a:off x="914400" y="4447641"/>
+            <a:ext cx="10607040" cy="2227478"/>
           </a:xfrm>
           <a:prstGeom prst="rect">
             <a:avLst/>
@@ -6821,11 +6938,11 @@
           <a:p>
             <a:pPr>
               <a:spcAft>
-                <a:spcPts val="1200"/>
+                <a:spcPts val="600"/>
               </a:spcAft>
             </a:pPr>
             <a:r>
-              <a:rPr sz="2000" b="1">
+              <a:rPr sz="1500" b="1">
                 <a:solidFill>
                   <a:srgbClr val="997929"/>
                 </a:solidFill>
@@ -6833,22 +6950,22 @@
               <a:t>◆  </a:t>
             </a:r>
             <a:r>
-              <a:rPr sz="2000" b="1">
+              <a:rPr sz="1500" b="0">
                 <a:solidFill>
                   <a:srgbClr val="2C2C2C"/>
                 </a:solidFill>
               </a:rPr>
-              <a:t>mRI gọn nhưng đắt — phải duyệt toàn vùng phổ biến</a:t>
+              <a:t>AprioriInverse: mili-giây — alphabet hiếm rất nhỏ (không phải benchmark cùng điều kiện)</a:t>
             </a:r>
           </a:p>
           <a:p>
             <a:pPr>
               <a:spcAft>
-                <a:spcPts val="1200"/>
+                <a:spcPts val="600"/>
               </a:spcAft>
             </a:pPr>
             <a:r>
-              <a:rPr sz="2000" b="1">
+              <a:rPr sz="1500" b="1">
                 <a:solidFill>
                   <a:srgbClr val="997929"/>
                 </a:solidFill>
@@ -6856,58 +6973,12 @@
               <a:t>◆  </a:t>
             </a:r>
             <a:r>
-              <a:rPr sz="2000" b="1">
+              <a:rPr sz="1500" b="1">
                 <a:solidFill>
                   <a:srgbClr val="2C2C2C"/>
                 </a:solidFill>
               </a:rPr>
-              <a:t>PRI rẻ nhưng hẹp — bỏ sót mẫu lai</a:t>
-            </a:r>
-          </a:p>
-          <a:p>
-            <a:pPr>
-              <a:spcAft>
-                <a:spcPts val="1200"/>
-              </a:spcAft>
-            </a:pPr>
-            <a:r>
-              <a:rPr sz="2000" b="1">
-                <a:solidFill>
-                  <a:srgbClr val="997929"/>
-                </a:solidFill>
-              </a:rPr>
-              <a:t>◆  </a:t>
-            </a:r>
-            <a:r>
-              <a:rPr sz="2000" b="1">
-                <a:solidFill>
-                  <a:srgbClr val="2C2C2C"/>
-                </a:solidFill>
-              </a:rPr>
-              <a:t>CORI cân bằng — ràng buộc kép, kết quả nhỏ &amp; giàu ngữ nghĩa</a:t>
-            </a:r>
-          </a:p>
-          <a:p>
-            <a:pPr>
-              <a:spcAft>
-                <a:spcPts val="1200"/>
-              </a:spcAft>
-            </a:pPr>
-            <a:r>
-              <a:rPr sz="2000" b="1">
-                <a:solidFill>
-                  <a:srgbClr val="997929"/>
-                </a:solidFill>
-              </a:rPr>
-              <a:t>◆  </a:t>
-            </a:r>
-            <a:r>
-              <a:rPr sz="2000" b="0">
-                <a:solidFill>
-                  <a:srgbClr val="997929"/>
-                </a:solidFill>
-              </a:rPr>
-              <a:t>Hướng 2021–2026: metaheuristic (MRI-CE), fuzzy, utility, privacy</a:t>
+              <a:t>CORI: bão hòa 90–104 mẫu khi nới minbond 0.95 → 0.5; mẫu bond = 1.0: {odor=m, …}, sup = 36 (0.44%)</a:t>
             </a:r>
           </a:p>
         </p:txBody>
@@ -6921,6 +6992,305 @@
 </file>
 
 <file path=ppt/slides/slide17.xml><?xml version="1.0" encoding="utf-8"?>
+<p:sld xmlns:a="http://schemas.openxmlformats.org/drawingml/2006/main" xmlns:p="http://schemas.openxmlformats.org/presentationml/2006/main" xmlns:r="http://schemas.openxmlformats.org/officeDocument/2006/relationships">
+  <p:cSld>
+    <p:bg>
+      <p:bgPr>
+        <a:solidFill>
+          <a:srgbClr val="FAF7F0"/>
+        </a:solidFill>
+        <a:effectLst/>
+      </p:bgPr>
+    </p:bg>
+    <p:spTree>
+      <p:nvGrpSpPr>
+        <p:cNvPr id="1" name=""/>
+        <p:cNvGrpSpPr/>
+        <p:nvPr/>
+      </p:nvGrpSpPr>
+      <p:grpSpPr/>
+      <p:sp>
+        <p:nvSpPr>
+          <p:cNvPr id="2" name="Rectangle 1"/>
+          <p:cNvSpPr/>
+          <p:nvPr/>
+        </p:nvSpPr>
+        <p:spPr>
+          <a:xfrm>
+            <a:off x="0" y="0"/>
+            <a:ext cx="411480" cy="6858000"/>
+          </a:xfrm>
+          <a:prstGeom prst="rect">
+            <a:avLst/>
+          </a:prstGeom>
+          <a:solidFill>
+            <a:srgbClr val="191919"/>
+          </a:solidFill>
+          <a:ln>
+            <a:noFill/>
+          </a:ln>
+          <a:effectLst/>
+        </p:spPr>
+        <p:style>
+          <a:lnRef idx="1">
+            <a:schemeClr val="accent1"/>
+          </a:lnRef>
+          <a:fillRef idx="3">
+            <a:schemeClr val="accent1"/>
+          </a:fillRef>
+          <a:effectRef idx="2">
+            <a:schemeClr val="accent1"/>
+          </a:effectRef>
+          <a:fontRef idx="minor">
+            <a:schemeClr val="lt1"/>
+          </a:fontRef>
+        </p:style>
+        <p:txBody>
+          <a:bodyPr rtlCol="0" anchor="ctr"/>
+          <a:lstStyle/>
+          <a:p>
+            <a:pPr algn="ctr"/>
+          </a:p>
+        </p:txBody>
+      </p:sp>
+      <p:sp>
+        <p:nvSpPr>
+          <p:cNvPr id="3" name="TextBox 2"/>
+          <p:cNvSpPr txBox="1"/>
+          <p:nvPr/>
+        </p:nvSpPr>
+        <p:spPr>
+          <a:xfrm>
+            <a:off x="0" y="6309360"/>
+            <a:ext cx="411480" cy="411480"/>
+          </a:xfrm>
+          <a:prstGeom prst="rect">
+            <a:avLst/>
+          </a:prstGeom>
+          <a:noFill/>
+        </p:spPr>
+        <p:txBody>
+          <a:bodyPr wrap="none" lIns="0" rIns="0">
+            <a:spAutoFit/>
+          </a:bodyPr>
+          <a:lstStyle/>
+          <a:p>
+            <a:pPr algn="ctr">
+              <a:defRPr sz="1100" b="1">
+                <a:solidFill>
+                  <a:srgbClr val="BF9A4A"/>
+                </a:solidFill>
+              </a:defRPr>
+            </a:pPr>
+            <a:r>
+              <a:t>17/18</a:t>
+            </a:r>
+          </a:p>
+        </p:txBody>
+      </p:sp>
+      <p:sp>
+        <p:nvSpPr>
+          <p:cNvPr id="4" name="TextBox 3"/>
+          <p:cNvSpPr txBox="1"/>
+          <p:nvPr/>
+        </p:nvSpPr>
+        <p:spPr>
+          <a:xfrm>
+            <a:off x="777240" y="320040"/>
+            <a:ext cx="10972800" cy="777240"/>
+          </a:xfrm>
+          <a:prstGeom prst="rect">
+            <a:avLst/>
+          </a:prstGeom>
+          <a:noFill/>
+        </p:spPr>
+        <p:txBody>
+          <a:bodyPr wrap="none">
+            <a:spAutoFit/>
+          </a:bodyPr>
+          <a:lstStyle/>
+          <a:p>
+            <a:pPr>
+              <a:defRPr sz="2900" b="1">
+                <a:solidFill>
+                  <a:srgbClr val="191919"/>
+                </a:solidFill>
+              </a:defRPr>
+            </a:pPr>
+            <a:r>
+              <a:t>Kết luận: ba đánh đổi</a:t>
+            </a:r>
+          </a:p>
+        </p:txBody>
+      </p:sp>
+      <p:sp>
+        <p:nvSpPr>
+          <p:cNvPr id="5" name="Rectangle 4"/>
+          <p:cNvSpPr/>
+          <p:nvPr/>
+        </p:nvSpPr>
+        <p:spPr>
+          <a:xfrm>
+            <a:off x="822960" y="1078992"/>
+            <a:ext cx="3840480" cy="44450"/>
+          </a:xfrm>
+          <a:prstGeom prst="rect">
+            <a:avLst/>
+          </a:prstGeom>
+          <a:solidFill>
+            <a:srgbClr val="BF9A4A"/>
+          </a:solidFill>
+          <a:ln>
+            <a:noFill/>
+          </a:ln>
+          <a:effectLst/>
+        </p:spPr>
+        <p:style>
+          <a:lnRef idx="1">
+            <a:schemeClr val="accent1"/>
+          </a:lnRef>
+          <a:fillRef idx="3">
+            <a:schemeClr val="accent1"/>
+          </a:fillRef>
+          <a:effectRef idx="2">
+            <a:schemeClr val="accent1"/>
+          </a:effectRef>
+          <a:fontRef idx="minor">
+            <a:schemeClr val="lt1"/>
+          </a:fontRef>
+        </p:style>
+        <p:txBody>
+          <a:bodyPr rtlCol="0" anchor="ctr"/>
+          <a:lstStyle/>
+          <a:p>
+            <a:pPr algn="ctr"/>
+          </a:p>
+        </p:txBody>
+      </p:sp>
+      <p:sp>
+        <p:nvSpPr>
+          <p:cNvPr id="6" name="TextBox 5"/>
+          <p:cNvSpPr txBox="1"/>
+          <p:nvPr/>
+        </p:nvSpPr>
+        <p:spPr>
+          <a:xfrm>
+            <a:off x="914400" y="1371600"/>
+            <a:ext cx="10607040" cy="5029200"/>
+          </a:xfrm>
+          <a:prstGeom prst="rect">
+            <a:avLst/>
+          </a:prstGeom>
+          <a:noFill/>
+        </p:spPr>
+        <p:txBody>
+          <a:bodyPr wrap="square">
+            <a:spAutoFit/>
+          </a:bodyPr>
+          <a:lstStyle/>
+          <a:p>
+            <a:pPr>
+              <a:spcAft>
+                <a:spcPts val="1200"/>
+              </a:spcAft>
+            </a:pPr>
+            <a:r>
+              <a:rPr sz="2000" b="1">
+                <a:solidFill>
+                  <a:srgbClr val="997929"/>
+                </a:solidFill>
+              </a:rPr>
+              <a:t>◆  </a:t>
+            </a:r>
+            <a:r>
+              <a:rPr sz="2000" b="1">
+                <a:solidFill>
+                  <a:srgbClr val="2C2C2C"/>
+                </a:solidFill>
+              </a:rPr>
+              <a:t>mRI gọn nhưng đắt — phải duyệt toàn vùng phổ biến</a:t>
+            </a:r>
+          </a:p>
+          <a:p>
+            <a:pPr>
+              <a:spcAft>
+                <a:spcPts val="1200"/>
+              </a:spcAft>
+            </a:pPr>
+            <a:r>
+              <a:rPr sz="2000" b="1">
+                <a:solidFill>
+                  <a:srgbClr val="997929"/>
+                </a:solidFill>
+              </a:rPr>
+              <a:t>◆  </a:t>
+            </a:r>
+            <a:r>
+              <a:rPr sz="2000" b="1">
+                <a:solidFill>
+                  <a:srgbClr val="2C2C2C"/>
+                </a:solidFill>
+              </a:rPr>
+              <a:t>PRI rẻ nhưng hẹp — bỏ sót mẫu lai</a:t>
+            </a:r>
+          </a:p>
+          <a:p>
+            <a:pPr>
+              <a:spcAft>
+                <a:spcPts val="1200"/>
+              </a:spcAft>
+            </a:pPr>
+            <a:r>
+              <a:rPr sz="2000" b="1">
+                <a:solidFill>
+                  <a:srgbClr val="997929"/>
+                </a:solidFill>
+              </a:rPr>
+              <a:t>◆  </a:t>
+            </a:r>
+            <a:r>
+              <a:rPr sz="2000" b="1">
+                <a:solidFill>
+                  <a:srgbClr val="2C2C2C"/>
+                </a:solidFill>
+              </a:rPr>
+              <a:t>CORI cân bằng — ràng buộc kép, kết quả nhỏ &amp; giàu ngữ nghĩa</a:t>
+            </a:r>
+          </a:p>
+          <a:p>
+            <a:pPr>
+              <a:spcAft>
+                <a:spcPts val="1200"/>
+              </a:spcAft>
+            </a:pPr>
+            <a:r>
+              <a:rPr sz="2000" b="1">
+                <a:solidFill>
+                  <a:srgbClr val="997929"/>
+                </a:solidFill>
+              </a:rPr>
+              <a:t>◆  </a:t>
+            </a:r>
+            <a:r>
+              <a:rPr sz="2000" b="0">
+                <a:solidFill>
+                  <a:srgbClr val="997929"/>
+                </a:solidFill>
+              </a:rPr>
+              <a:t>Hướng 2021–2026: metaheuristic (MRI-CE), fuzzy, utility, privacy</a:t>
+            </a:r>
+          </a:p>
+        </p:txBody>
+      </p:sp>
+    </p:spTree>
+  </p:cSld>
+  <p:clrMapOvr>
+    <a:masterClrMapping/>
+  </p:clrMapOvr>
+</p:sld>
+</file>
+
+<file path=ppt/slides/slide18.xml><?xml version="1.0" encoding="utf-8"?>
 <p:sld xmlns:a="http://schemas.openxmlformats.org/drawingml/2006/main" xmlns:p="http://schemas.openxmlformats.org/presentationml/2006/main" xmlns:r="http://schemas.openxmlformats.org/officeDocument/2006/relationships">
   <p:cSld>
     <p:bg>
@@ -7206,7 +7576,7 @@
               </a:defRPr>
             </a:pPr>
             <a:r>
-              <a:t>2/17</a:t>
+              <a:t>2/18</a:t>
             </a:r>
           </a:p>
         </p:txBody>
@@ -7528,7 +7898,7 @@
               </a:defRPr>
             </a:pPr>
             <a:r>
-              <a:t>3/17</a:t>
+              <a:t>3/18</a:t>
             </a:r>
           </a:p>
         </p:txBody>
@@ -7827,7 +8197,7 @@
               </a:defRPr>
             </a:pPr>
             <a:r>
-              <a:t>4/17</a:t>
+              <a:t>4/18</a:t>
             </a:r>
           </a:p>
         </p:txBody>
@@ -8126,7 +8496,7 @@
               </a:defRPr>
             </a:pPr>
             <a:r>
-              <a:t>5/17</a:t>
+              <a:t>5/18</a:t>
             </a:r>
           </a:p>
         </p:txBody>
@@ -8471,7 +8841,7 @@
               </a:defRPr>
             </a:pPr>
             <a:r>
-              <a:t>6/17</a:t>
+              <a:t>6/18</a:t>
             </a:r>
           </a:p>
         </p:txBody>
@@ -8506,7 +8876,7 @@
               </a:defRPr>
             </a:pPr>
             <a:r>
-              <a:t>Ba định nghĩa mẫu hiếm</a:t>
+              <a:t>Toàn cảnh: dòng chảy bài toán trên ví dụ</a:t>
             </a:r>
           </a:p>
         </p:txBody>
@@ -8591,12 +8961,12 @@
               <a:t>◆  </a:t>
             </a:r>
             <a:r>
-              <a:rPr sz="2000" b="0">
-                <a:solidFill>
-                  <a:srgbClr val="2C2C2C"/>
-                </a:solidFill>
-              </a:rPr>
-              <a:t>Infrequent: sup &lt; minsup — bùng nổ, chứa cả sup = 0</a:t>
+              <a:rPr sz="2000" b="1">
+                <a:solidFill>
+                  <a:srgbClr val="997929"/>
+                </a:solidFill>
+              </a:rPr>
+              <a:t>CSDL 4 giao dịch —[minsup]→ Khai thác mẫu hiếm —[minbond]→ Lọc tương quan → CORI</a:t>
             </a:r>
           </a:p>
           <a:p>
@@ -8614,12 +8984,12 @@
               <a:t>◆  </a:t>
             </a:r>
             <a:r>
-              <a:rPr sz="2000" b="1">
+              <a:rPr sz="2000" b="0">
                 <a:solidFill>
                   <a:srgbClr val="2C2C2C"/>
                 </a:solidFill>
               </a:rPr>
-              <a:t>Minimal rare (mRI): hiếm, mọi tập con đều phổ biến</a:t>
+              <a:t>Bước 1 — khai thác hiếm: AprioriRare → mRI = {bread}, {lemon, cake}; AprioriInverse → PRI = {bread}, …</a:t>
             </a:r>
           </a:p>
           <a:p>
@@ -8629,20 +8999,20 @@
               </a:spcAft>
             </a:pPr>
             <a:r>
+              <a:rPr sz="2000" b="1">
+                <a:solidFill>
+                  <a:srgbClr val="997929"/>
+                </a:solidFill>
+              </a:rPr>
+              <a:t>◆  </a:t>
+            </a:r>
+            <a:r>
               <a:rPr sz="2000" b="0">
                 <a:solidFill>
-                  <a:srgbClr val="2C2C2C"/>
-                </a:solidFill>
-              </a:rPr>
-              <a:t>      –  </a:t>
-            </a:r>
-            <a:r>
-              <a:rPr sz="2000" b="0">
-                <a:solidFill>
-                  <a:srgbClr val="997929"/>
-                </a:solidFill>
-              </a:rPr>
-              <a:t>→ biên dưới của vùng hiếm trong dàn itemset</a:t>
+                  <a:srgbClr val="C15937"/>
+                </a:solidFill>
+              </a:rPr>
+              <a:t>Bước 2 — lọc mẫu giả: loại {pasta, cake} vì lift = 1, bond = 0.5 (đi cùng nhau chỉ do pasta có mặt khắp nơi)</a:t>
             </a:r>
           </a:p>
           <a:p>
@@ -8662,10 +9032,10 @@
             <a:r>
               <a:rPr sz="2000" b="1">
                 <a:solidFill>
-                  <a:srgbClr val="2C2C2C"/>
-                </a:solidFill>
-              </a:rPr>
-              <a:t>Perfectly rare (PRI): minsup ≤ sup &lt; maxsup, mọi item thành phần đều hiếm</a:t>
+                  <a:srgbClr val="40695B"/>
+                </a:solidFill>
+              </a:rPr>
+              <a:t>Kết quả CORI: {bread}, {cake}, {orange, cake} — vừa hiếm vừa thật sự gắn kết</a:t>
             </a:r>
           </a:p>
           <a:p>
@@ -8688,7 +9058,7 @@
                   <a:srgbClr val="2C2C2C"/>
                 </a:solidFill>
               </a:rPr>
-              <a:t>Ví dụ (minsup=2): mRI = {bread}, {lemon, cake}   •   PRI = {bread}</a:t>
+              <a:t>Các phần sau đi sâu vào từng khối trên chính ví dụ này</a:t>
             </a:r>
           </a:p>
         </p:txBody>
@@ -8793,7 +9163,7 @@
               </a:defRPr>
             </a:pPr>
             <a:r>
-              <a:t>7/17</a:t>
+              <a:t>7/18</a:t>
             </a:r>
           </a:p>
         </p:txBody>
@@ -8828,7 +9198,7 @@
               </a:defRPr>
             </a:pPr>
             <a:r>
-              <a:t>AprioriRare: tìm biên hiếm tối thiểu</a:t>
+              <a:t>Ba định nghĩa mẫu hiếm</a:t>
             </a:r>
           </a:p>
         </p:txBody>
@@ -8918,7 +9288,7 @@
                   <a:srgbClr val="2C2C2C"/>
                 </a:solidFill>
               </a:rPr>
-              <a:t>Duyệt theo mức (level-wise) như Apriori</a:t>
+              <a:t>Infrequent: sup &lt; minsup — bùng nổ, chứa cả sup = 0</a:t>
             </a:r>
           </a:p>
           <a:p>
@@ -8941,7 +9311,7 @@
                   <a:srgbClr val="2C2C2C"/>
                 </a:solidFill>
               </a:rPr>
-              <a:t>Ứng viên sống sót qua prune mà không phổ biến → chính là mRI</a:t>
+              <a:t>Minimal rare (mRI): hiếm, mọi tập con đều phổ biến</a:t>
             </a:r>
           </a:p>
           <a:p>
@@ -8951,20 +9321,20 @@
               </a:spcAft>
             </a:pPr>
             <a:r>
-              <a:rPr sz="2000" b="1">
+              <a:rPr sz="2000" b="0">
+                <a:solidFill>
+                  <a:srgbClr val="2C2C2C"/>
+                </a:solidFill>
+              </a:rPr>
+              <a:t>      –  </a:t>
+            </a:r>
+            <a:r>
+              <a:rPr sz="2000" b="0">
                 <a:solidFill>
                   <a:srgbClr val="997929"/>
                 </a:solidFill>
               </a:rPr>
-              <a:t>◆  </a:t>
-            </a:r>
-            <a:r>
-              <a:rPr sz="2000" b="0">
-                <a:solidFill>
-                  <a:srgbClr val="2C2C2C"/>
-                </a:solidFill>
-              </a:rPr>
-              <a:t>Itemset hiếm không dùng sinh ứng viên tiếp</a:t>
+              <a:t>→ biên dưới của vùng hiếm trong dàn itemset</a:t>
             </a:r>
           </a:p>
           <a:p>
@@ -8982,12 +9352,12 @@
               <a:t>◆  </a:t>
             </a:r>
             <a:r>
-              <a:rPr sz="2000" b="0">
-                <a:solidFill>
-                  <a:srgbClr val="40695B"/>
-                </a:solidFill>
-              </a:rPr>
-              <a:t>Ví dụ: mRI = {bread}, {lemon, cake}  ✓ khớp bài giảng</a:t>
+              <a:rPr sz="2000" b="1">
+                <a:solidFill>
+                  <a:srgbClr val="2C2C2C"/>
+                </a:solidFill>
+              </a:rPr>
+              <a:t>Perfectly rare (PRI): minsup ≤ sup &lt; maxsup, mọi item thành phần đều hiếm</a:t>
             </a:r>
           </a:p>
           <a:p>
@@ -9005,12 +9375,12 @@
               <a:t>◆  </a:t>
             </a:r>
             <a:r>
-              <a:rPr sz="2000" b="1">
-                <a:solidFill>
-                  <a:srgbClr val="C15937"/>
-                </a:solidFill>
-              </a:rPr>
-              <a:t>Nhược: phải duyệt toàn bộ vùng phổ biến</a:t>
+              <a:rPr sz="2000" b="0">
+                <a:solidFill>
+                  <a:srgbClr val="2C2C2C"/>
+                </a:solidFill>
+              </a:rPr>
+              <a:t>Ví dụ (minsup=2): mRI = {bread}, {lemon, cake}   •   PRI = {bread}</a:t>
             </a:r>
           </a:p>
         </p:txBody>
@@ -9115,7 +9485,7 @@
               </a:defRPr>
             </a:pPr>
             <a:r>
-              <a:t>8/17</a:t>
+              <a:t>8/18</a:t>
             </a:r>
           </a:p>
         </p:txBody>
@@ -9150,7 +9520,7 @@
               </a:defRPr>
             </a:pPr>
             <a:r>
-              <a:t>AprioriInverse: thu hẹp ngay từ đầu</a:t>
+              <a:t>AprioriRare: tìm biên hiếm tối thiểu</a:t>
             </a:r>
           </a:p>
         </p:txBody>
@@ -9240,7 +9610,7 @@
                   <a:srgbClr val="2C2C2C"/>
                 </a:solidFill>
               </a:rPr>
-              <a:t>Hai ngưỡng (minsup, maxsup)</a:t>
+              <a:t>Duyệt theo mức (level-wise) như Apriori</a:t>
             </a:r>
           </a:p>
           <a:p>
@@ -9263,7 +9633,7 @@
                   <a:srgbClr val="2C2C2C"/>
                 </a:solidFill>
               </a:rPr>
-              <a:t>Loại mọi item phổ biến ngay bước khởi tạo</a:t>
+              <a:t>Ứng viên sống sót qua prune mà không phổ biến → chính là mRI</a:t>
             </a:r>
           </a:p>
           <a:p>
@@ -9286,7 +9656,7 @@
                   <a:srgbClr val="2C2C2C"/>
                 </a:solidFill>
               </a:rPr>
-              <a:t>Đúng đắn: mọi item hiếm → mọi tập con hiếm (điều kiện PRI tự thoả)</a:t>
+              <a:t>Itemset hiếm không dùng sinh ứng viên tiếp</a:t>
             </a:r>
           </a:p>
           <a:p>
@@ -9306,10 +9676,10 @@
             <a:r>
               <a:rPr sz="2000" b="0">
                 <a:solidFill>
-                  <a:srgbClr val="C15937"/>
-                </a:solidFill>
-              </a:rPr>
-              <a:t>Đổi lại: bỏ sót mẫu lai {item hiếm + item phổ biến}</a:t>
+                  <a:srgbClr val="40695B"/>
+                </a:solidFill>
+              </a:rPr>
+              <a:t>Ví dụ: mRI = {bread}, {lemon, cake}  ✓ khớp bài giảng</a:t>
             </a:r>
           </a:p>
           <a:p>
@@ -9327,12 +9697,12 @@
               <a:t>◆  </a:t>
             </a:r>
             <a:r>
-              <a:rPr sz="2000" b="0">
-                <a:solidFill>
-                  <a:srgbClr val="40695B"/>
-                </a:solidFill>
-              </a:rPr>
-              <a:t>Ví dụ (1.1, 3.1): 5 PRI  ✓ khớp bài giảng</a:t>
+              <a:rPr sz="2000" b="1">
+                <a:solidFill>
+                  <a:srgbClr val="C15937"/>
+                </a:solidFill>
+              </a:rPr>
+              <a:t>Nhược: phải duyệt toàn bộ vùng phổ biến</a:t>
             </a:r>
           </a:p>
         </p:txBody>
@@ -9437,7 +9807,7 @@
               </a:defRPr>
             </a:pPr>
             <a:r>
-              <a:t>9/17</a:t>
+              <a:t>9/18</a:t>
             </a:r>
           </a:p>
         </p:txBody>
@@ -9472,7 +9842,7 @@
               </a:defRPr>
             </a:pPr>
             <a:r>
-              <a:t>Mẫu giả: phổ biến ≠ đáng tin</a:t>
+              <a:t>AprioriInverse: thu hẹp ngay từ đầu</a:t>
             </a:r>
           </a:p>
         </p:txBody>
@@ -9557,12 +9927,12 @@
               <a:t>◆  </a:t>
             </a:r>
             <a:r>
-              <a:rPr sz="2000" b="1">
+              <a:rPr sz="2000" b="0">
                 <a:solidFill>
                   <a:srgbClr val="2C2C2C"/>
                 </a:solidFill>
               </a:rPr>
-              <a:t>{pasta, cake} xuất hiện ở 50% giao dịch</a:t>
+              <a:t>Hai ngưỡng (minsup, maxsup)</a:t>
             </a:r>
           </a:p>
           <a:p>
@@ -9580,12 +9950,12 @@
               <a:t>◆  </a:t>
             </a:r>
             <a:r>
-              <a:rPr sz="2000" b="0">
+              <a:rPr sz="2000" b="1">
                 <a:solidFill>
                   <a:srgbClr val="2C2C2C"/>
                 </a:solidFill>
               </a:rPr>
-              <a:t>Nhưng pasta có mặt trong mọi giao dịch</a:t>
+              <a:t>Loại mọi item phổ biến ngay bước khởi tạo</a:t>
             </a:r>
           </a:p>
           <a:p>
@@ -9605,10 +9975,10 @@
             <a:r>
               <a:rPr sz="2000" b="0">
                 <a:solidFill>
-                  <a:srgbClr val="C15937"/>
-                </a:solidFill>
-              </a:rPr>
-              <a:t>Đồng xuất hiện là tất yếu — không có liên hệ thật (spurious)</a:t>
+                  <a:srgbClr val="2C2C2C"/>
+                </a:solidFill>
+              </a:rPr>
+              <a:t>Đúng đắn: mọi item hiếm → mọi tập con hiếm (điều kiện PRI tự thoả)</a:t>
             </a:r>
           </a:p>
           <a:p>
@@ -9628,10 +9998,33 @@
             <a:r>
               <a:rPr sz="2000" b="0">
                 <a:solidFill>
+                  <a:srgbClr val="C15937"/>
+                </a:solidFill>
+              </a:rPr>
+              <a:t>Đổi lại: bỏ sót mẫu lai {item hiếm + item phổ biến}</a:t>
+            </a:r>
+          </a:p>
+          <a:p>
+            <a:pPr>
+              <a:spcAft>
+                <a:spcPts val="1200"/>
+              </a:spcAft>
+            </a:pPr>
+            <a:r>
+              <a:rPr sz="2000" b="1">
+                <a:solidFill>
                   <a:srgbClr val="997929"/>
                 </a:solidFill>
               </a:rPr>
-              <a:t>Cần độ đo tương quan để lọc</a:t>
+              <a:t>◆  </a:t>
+            </a:r>
+            <a:r>
+              <a:rPr sz="2000" b="0">
+                <a:solidFill>
+                  <a:srgbClr val="40695B"/>
+                </a:solidFill>
+              </a:rPr>
+              <a:t>Ví dụ (1.1, 3.1): 5 PRI  ✓ khớp bài giảng</a:t>
             </a:r>
           </a:p>
         </p:txBody>
